--- a/experiments/results/planb_deck.pptx
+++ b/experiments/results/planb_deck.pptx
@@ -21,6 +21,7 @@
     <p:sldId id="269" r:id="rId20"/>
     <p:sldId id="270" r:id="rId21"/>
     <p:sldId id="271" r:id="rId22"/>
+    <p:sldId id="272" r:id="rId23"/>
   </p:sldIdLst>
   <p:sldSz cx="12191695" cy="6858000" type="screen4x3"/>
   <p:notesSz cx="6858000" cy="9144000"/>
@@ -3263,12 +3264,27 @@
               </a:spcAft>
             </a:pPr>
             <a:r>
+              <a:rPr sz="1500" b="1">
+                <a:solidFill>
+                  <a:srgbClr val="3FB950"/>
+                </a:solidFill>
+              </a:rPr>
+              <a:t>Every training input is public — LibriTTS-R + MUSAN + OpenSLR SLR28 RIRs.</a:t>
+            </a:r>
+          </a:p>
+          <a:p>
+            <a:pPr>
+              <a:spcAft>
+                <a:spcPts val="400"/>
+              </a:spcAft>
+            </a:pPr>
+            <a:r>
               <a:rPr sz="1300">
                 <a:solidFill>
                   <a:srgbClr val="9AA7B4"/>
                 </a:solidFill>
               </a:rPr>
-              <a:t>Clement Laroche · final model ckpt_stage2_v3 · LibriTTS-R → VoiceBank-DEMAND held-out</a:t>
+              <a:t>Clement Laroche · published model ckpt_stage2_open · VoiceBank-DEMAND held-out</a:t>
             </a:r>
           </a:p>
         </p:txBody>
@@ -4417,7 +4433,7 @@
                             <a:srgbClr val="58A6FF"/>
                           </a:solidFill>
                         </a:rPr>
-                        <a:t>v3</a:t>
+                        <a:t>published (open)</a:t>
                       </a:r>
                     </a:p>
                   </a:txBody>
@@ -4482,7 +4498,7 @@
                             <a:srgbClr val="E6EDF3"/>
                           </a:solidFill>
                         </a:rPr>
-                        <a:t>ρ 0.50; penalizes low SNR; names noise 99% (low SNR)</a:t>
+                        <a:t>ρ 0.46; penalizes low SNR; names noise 98% (low SNR)</a:t>
                       </a:r>
                     </a:p>
                   </a:txBody>
@@ -4547,7 +4563,7 @@
                             <a:srgbClr val="E6EDF3"/>
                           </a:solidFill>
                         </a:rPr>
-                        <a:t>ρ 0.69–0.75 (in metrics' band); 81 distinct (2.10–4.89)</a:t>
+                        <a:t>ρ 0.65–0.71; 63 distinct values (1.90–4.89)</a:t>
                       </a:r>
                     </a:p>
                   </a:txBody>
@@ -4591,7 +4607,7 @@
                             <a:srgbClr val="E6EDF3"/>
                           </a:solidFill>
                         </a:rPr>
-                        <a:t>reverb −0.11, bw −0.39, clip −0.33</a:t>
+                        <a:t>reverb −0.27, bw −0.37, clip −0.48</a:t>
                       </a:r>
                     </a:p>
                   </a:txBody>
@@ -4612,7 +4628,7 @@
                             <a:srgbClr val="E6EDF3"/>
                           </a:solidFill>
                         </a:rPr>
-                        <a:t>reverb −0.95, bw −0.81, clip −0.83, noise −0.93</a:t>
+                        <a:t>reverb −0.80, bw −0.88, clip −0.81, noise −0.93</a:t>
                       </a:r>
                     </a:p>
                   </a:txBody>
@@ -4677,7 +4693,7 @@
                             <a:srgbClr val="E6EDF3"/>
                           </a:solidFill>
                         </a:rPr>
-                        <a:t>MOS gain +0.68 (76% of files), ρ +0.22</a:t>
+                        <a:t>MOS gain +1.05 (91% of files), ρ +0.32</a:t>
                       </a:r>
                     </a:p>
                   </a:txBody>
@@ -4806,7 +4822,7 @@
                   <a:srgbClr val="3FB950"/>
                 </a:solidFill>
               </a:rPr>
-              <a:t>5→81</a:t>
+              <a:t>5→63</a:t>
             </a:r>
           </a:p>
           <a:p>
@@ -4871,7 +4887,7 @@
                   <a:srgbClr val="3FB950"/>
                 </a:solidFill>
               </a:rPr>
-              <a:t>−.11→−.95</a:t>
+              <a:t>+0.63</a:t>
             </a:r>
           </a:p>
           <a:p>
@@ -4882,7 +4898,7 @@
                   <a:srgbClr val="9AA7B4"/>
                 </a:solidFill>
               </a:rPr>
-              <a:t>reverb ρ</a:t>
+              <a:t>real-reverb ρ vs PESQ</a:t>
             </a:r>
           </a:p>
         </p:txBody>
@@ -5001,7 +5017,7 @@
                   <a:srgbClr val="3FB950"/>
                 </a:solidFill>
               </a:rPr>
-              <a:t>90%</a:t>
+              <a:t>+1.05</a:t>
             </a:r>
           </a:p>
           <a:p>
@@ -5012,7 +5028,7 @@
                   <a:srgbClr val="9AA7B4"/>
                 </a:solidFill>
               </a:rPr>
-              <a:t>real-noise naming</a:t>
+              <a:t>enhancement MOS gain</a:t>
             </a:r>
           </a:p>
         </p:txBody>
@@ -5189,7 +5205,7 @@
                   <a:srgbClr val="E6EDF3"/>
                 </a:solidFill>
               </a:rPr>
-              <a:t>•  Left: MOS vs SNR — v3 cloud spreads the full range and slopes with SNR (was a flat band).</a:t>
+              <a:t>•  Left: MOS vs SNR — the cloud spreads the full range and slopes with SNR (was a flat band).</a:t>
             </a:r>
           </a:p>
           <a:p>
@@ -5204,14 +5220,14 @@
                   <a:srgbClr val="E6EDF3"/>
                 </a:solidFill>
               </a:rPr>
-              <a:t>•  Right: v3 MOS vs metrics — continuous, rank-aligned (ρ 0.69–0.75); stripes gone.</a:t>
+              <a:t>•  Right: MOS vs metrics — continuous, rank-aligned (ρ 0.65–0.71); the stripes are gone.</a:t>
             </a:r>
           </a:p>
         </p:txBody>
       </p:sp>
       <p:pic>
         <p:nvPicPr>
-          <p:cNvPr id="6" name="Picture 5" descr="mos_vs_snr_v3.png"/>
+          <p:cNvPr id="6" name="Picture 5" descr="mos_vs_snr_open.png"/>
           <p:cNvPicPr>
             <a:picLocks noChangeAspect="1"/>
           </p:cNvPicPr>
@@ -5235,7 +5251,7 @@
       </p:pic>
       <p:pic>
         <p:nvPicPr>
-          <p:cNvPr id="7" name="Picture 6" descr="mos_vs_neural_v3.png"/>
+          <p:cNvPr id="7" name="Picture 6" descr="mos_vs_neural_open.png"/>
           <p:cNvPicPr>
             <a:picLocks noChangeAspect="1"/>
           </p:cNvPicPr>
@@ -5444,14 +5460,14 @@
                   <a:srgbClr val="E6EDF3"/>
                 </a:solidFill>
               </a:rPr>
-              <a:t>•  Right: enhancement — v3 MOS rises with denoiser gain (usable as an enhancer evaluator).</a:t>
+              <a:t>•  Right: enhancement — MOS rises with denoiser gain (+1.05, 91% of files): a usable enhancer evaluator.</a:t>
             </a:r>
           </a:p>
         </p:txBody>
       </p:sp>
       <p:pic>
         <p:nvPicPr>
-          <p:cNvPr id="6" name="Picture 5" descr="degradation_sweep_v3.png"/>
+          <p:cNvPr id="6" name="Picture 5" descr="degradation_sweep_open.png"/>
           <p:cNvPicPr>
             <a:picLocks noChangeAspect="1"/>
           </p:cNvPicPr>
@@ -5465,8 +5481,8 @@
         </p:blipFill>
         <p:spPr>
           <a:xfrm>
-            <a:off x="548640" y="3701796"/>
-            <a:ext cx="5303520" cy="1237488"/>
+            <a:off x="548640" y="3690747"/>
+            <a:ext cx="5303520" cy="1259586"/>
           </a:xfrm>
           <a:prstGeom prst="rect">
             <a:avLst/>
@@ -5475,7 +5491,7 @@
       </p:pic>
       <p:pic>
         <p:nvPicPr>
-          <p:cNvPr id="7" name="Picture 6" descr="enhancement_blindness.png"/>
+          <p:cNvPr id="7" name="Picture 6" descr="enhancement_open.png"/>
           <p:cNvPicPr>
             <a:picLocks noChangeAspect="1"/>
           </p:cNvPicPr>
@@ -5489,8 +5505,8 @@
         </p:blipFill>
         <p:spPr>
           <a:xfrm>
-            <a:off x="6126479" y="3259836"/>
-            <a:ext cx="5303520" cy="2121408"/>
+            <a:off x="6126479" y="3356263"/>
+            <a:ext cx="5303520" cy="1928553"/>
           </a:xfrm>
           <a:prstGeom prst="rect">
             <a:avLst/>
@@ -5684,7 +5700,7 @@
                   <a:srgbClr val="3FB950"/>
                 </a:solidFill>
               </a:rPr>
-              <a:t>v3 uses 81 distinct values spanning 2.10–4.89 — it meters quality instead of bucketing it.</a:t>
+              <a:t>The published model uses 63 distinct values spanning 1.90–4.89 — it meters quality, not buckets.</a:t>
             </a:r>
           </a:p>
           <a:p>
@@ -5706,7 +5722,7 @@
       </p:sp>
       <p:pic>
         <p:nvPicPr>
-          <p:cNvPr id="6" name="Picture 5" descr="mos_scale_usage.png"/>
+          <p:cNvPr id="6" name="Picture 5" descr="mos_scale_usage_open.png"/>
           <p:cNvPicPr>
             <a:picLocks noChangeAspect="1"/>
           </p:cNvPicPr>
@@ -5721,7 +5737,7 @@
         <p:spPr>
           <a:xfrm>
             <a:off x="6400800" y="1417320"/>
-            <a:ext cx="5486400" cy="1995055"/>
+            <a:ext cx="5486400" cy="1410789"/>
           </a:xfrm>
           <a:prstGeom prst="rect">
             <a:avLst/>
@@ -5818,7 +5834,7 @@
                   <a:srgbClr val="58A6FF"/>
                 </a:solidFill>
               </a:rPr>
-              <a:t>Bottom line</a:t>
+              <a:t>The reverb result: why the benchmark lied</a:t>
             </a:r>
           </a:p>
         </p:txBody>
@@ -5876,7 +5892,7 @@
         <p:spPr>
           <a:xfrm>
             <a:off x="594360" y="1325880"/>
-            <a:ext cx="11155680" cy="5257800"/>
+            <a:ext cx="6035040" cy="5257800"/>
           </a:xfrm>
           <a:prstGeom prst="rect">
             <a:avLst/>
@@ -5895,12 +5911,12 @@
               </a:spcAft>
             </a:pPr>
             <a:r>
-              <a:rPr sz="1450">
-                <a:solidFill>
-                  <a:srgbClr val="E6EDF3"/>
-                </a:solidFill>
-              </a:rPr>
-              <a:t>v3 turns a lenient noise specialist with a weak 5-value MOS into a calibrated rater:</a:t>
+              <a:rPr sz="1700" b="1">
+                <a:solidFill>
+                  <a:srgbClr val="BC8CFF"/>
+                </a:solidFill>
+              </a:rPr>
+              <a:t>Two models, two reverb distributions</a:t>
             </a:r>
           </a:p>
           <a:p>
@@ -5915,7 +5931,7 @@
                   <a:srgbClr val="E6EDF3"/>
                 </a:solidFill>
               </a:rPr>
-              <a:t>•  MOS de-compressed (5→81), agreeing with PESQ/NISQA/DNSMOS as well as they agree with each other</a:t>
+              <a:t>•  Scored against PESQ — an independent metric that knows nothing about either</a:t>
             </a:r>
           </a:p>
           <a:p>
@@ -5925,12 +5941,12 @@
               </a:spcAft>
             </a:pPr>
             <a:r>
-              <a:rPr sz="1450">
-                <a:solidFill>
-                  <a:srgbClr val="E6EDF3"/>
-                </a:solidFill>
-              </a:rPr>
-              <a:t>•  Perceives and ranks every degradation type — incl. the former reverb blind spot</a:t>
+              <a:rPr sz="1300">
+                <a:solidFill>
+                  <a:srgbClr val="9AA7B4"/>
+                </a:solidFill>
+              </a:rPr>
+              <a:t>    – model's severity map — v3 and the open model disagree, but only about WHICH reverb.</a:t>
             </a:r>
           </a:p>
           <a:p>
@@ -5945,7 +5961,313 @@
                   <a:srgbClr val="E6EDF3"/>
                 </a:solidFill>
               </a:rPr>
-              <a:t>•  Tracks enhancement gain → usable as an automatic enhancer evaluator (it wasn't before)</a:t>
+              <a:t>•  synth_reverb injects an explicit direct path → synthetic reverb has an artificially</a:t>
+            </a:r>
+          </a:p>
+          <a:p>
+            <a:pPr>
+              <a:spcAft>
+                <a:spcPts val="400"/>
+              </a:spcAft>
+            </a:pPr>
+            <a:r>
+              <a:rPr sz="1300">
+                <a:solidFill>
+                  <a:srgbClr val="9AA7B4"/>
+                </a:solidFill>
+              </a:rPr>
+              <a:t>    – HIGH DRR at every RT60. v3 keys on RT60 alone, which is exactly how that sweep grades.</a:t>
+            </a:r>
+          </a:p>
+          <a:p>
+            <a:pPr>
+              <a:spcAft>
+                <a:spcPts val="400"/>
+              </a:spcAft>
+            </a:pPr>
+            <a:r>
+              <a:rPr sz="1500" b="1">
+                <a:solidFill>
+                  <a:srgbClr val="3FB950"/>
+                </a:solidFill>
+              </a:rPr>
+              <a:t>On REAL rooms the open model tracks perceived quality ~2x better (+0.63 vs +0.33).</a:t>
+            </a:r>
+          </a:p>
+          <a:p>
+            <a:pPr>
+              <a:spcAft>
+                <a:spcPts val="400"/>
+              </a:spcAft>
+            </a:pPr>
+            <a:r>
+              <a:rPr sz="1300">
+                <a:solidFill>
+                  <a:srgbClr val="9AA7B4"/>
+                </a:solidFill>
+              </a:rPr>
+              <a:t>Lesson: the held-out sweep was measuring the artefact, not the ability. The fix was a</a:t>
+            </a:r>
+          </a:p>
+          <a:p>
+            <a:pPr>
+              <a:spcAft>
+                <a:spcPts val="400"/>
+              </a:spcAft>
+            </a:pPr>
+            <a:r>
+              <a:rPr sz="1300">
+                <a:solidFill>
+                  <a:srgbClr val="9AA7B4"/>
+                </a:solidFill>
+              </a:rPr>
+              <a:t>held-out REAL-RIR control (eval_realreverb.py) — now part of the repo.</a:t>
+            </a:r>
+          </a:p>
+        </p:txBody>
+      </p:sp>
+      <p:pic>
+        <p:nvPicPr>
+          <p:cNvPr id="6" name="Picture 5" descr="reverb_real_vs_synthetic.png"/>
+          <p:cNvPicPr>
+            <a:picLocks noChangeAspect="1"/>
+          </p:cNvPicPr>
+          <p:nvPr/>
+        </p:nvPicPr>
+        <p:blipFill>
+          <a:blip r:embed="rId2"/>
+          <a:stretch>
+            <a:fillRect/>
+          </a:stretch>
+        </p:blipFill>
+        <p:spPr>
+          <a:xfrm>
+            <a:off x="6400800" y="1417320"/>
+            <a:ext cx="5486400" cy="3200400"/>
+          </a:xfrm>
+          <a:prstGeom prst="rect">
+            <a:avLst/>
+          </a:prstGeom>
+        </p:spPr>
+      </p:pic>
+    </p:spTree>
+  </p:cSld>
+  <p:clrMapOvr>
+    <a:masterClrMapping/>
+  </p:clrMapOvr>
+</p:sld>
+</file>
+
+<file path=ppt/slides/slide17.xml><?xml version="1.0" encoding="utf-8"?>
+<p:sld xmlns:a="http://schemas.openxmlformats.org/drawingml/2006/main" xmlns:p="http://schemas.openxmlformats.org/presentationml/2006/main" xmlns:r="http://schemas.openxmlformats.org/officeDocument/2006/relationships">
+  <p:cSld>
+    <p:spTree>
+      <p:nvGrpSpPr>
+        <p:cNvPr id="1" name=""/>
+        <p:cNvGrpSpPr/>
+        <p:nvPr/>
+      </p:nvGrpSpPr>
+      <p:grpSpPr/>
+      <p:sp>
+        <p:nvSpPr>
+          <p:cNvPr id="2" name="Rectangle 1"/>
+          <p:cNvSpPr/>
+          <p:nvPr/>
+        </p:nvSpPr>
+        <p:spPr>
+          <a:xfrm>
+            <a:off x="0" y="0"/>
+            <a:ext cx="12191695" cy="6858000"/>
+          </a:xfrm>
+          <a:prstGeom prst="rect">
+            <a:avLst/>
+          </a:prstGeom>
+          <a:solidFill>
+            <a:srgbClr val="0D1117"/>
+          </a:solidFill>
+          <a:ln>
+            <a:noFill/>
+          </a:ln>
+          <a:effectLst/>
+        </p:spPr>
+        <p:style>
+          <a:lnRef idx="1">
+            <a:schemeClr val="accent1"/>
+          </a:lnRef>
+          <a:fillRef idx="3">
+            <a:schemeClr val="accent1"/>
+          </a:fillRef>
+          <a:effectRef idx="2">
+            <a:schemeClr val="accent1"/>
+          </a:effectRef>
+          <a:fontRef idx="minor">
+            <a:schemeClr val="lt1"/>
+          </a:fontRef>
+        </p:style>
+        <p:txBody>
+          <a:bodyPr rtlCol="0" anchor="ctr"/>
+          <a:lstStyle/>
+          <a:p>
+            <a:pPr algn="ctr"/>
+          </a:p>
+        </p:txBody>
+      </p:sp>
+      <p:sp>
+        <p:nvSpPr>
+          <p:cNvPr id="3" name="TextBox 2"/>
+          <p:cNvSpPr txBox="1"/>
+          <p:nvPr/>
+        </p:nvSpPr>
+        <p:spPr>
+          <a:xfrm>
+            <a:off x="502920" y="274320"/>
+            <a:ext cx="11155680" cy="914400"/>
+          </a:xfrm>
+          <a:prstGeom prst="rect">
+            <a:avLst/>
+          </a:prstGeom>
+          <a:noFill/>
+        </p:spPr>
+        <p:txBody>
+          <a:bodyPr wrap="square">
+            <a:spAutoFit/>
+          </a:bodyPr>
+          <a:lstStyle/>
+          <a:p>
+            <a:r>
+              <a:rPr sz="3000" b="1">
+                <a:solidFill>
+                  <a:srgbClr val="58A6FF"/>
+                </a:solidFill>
+              </a:rPr>
+              <a:t>Bottom line</a:t>
+            </a:r>
+          </a:p>
+        </p:txBody>
+      </p:sp>
+      <p:sp>
+        <p:nvSpPr>
+          <p:cNvPr id="4" name="Rectangle 3"/>
+          <p:cNvSpPr/>
+          <p:nvPr/>
+        </p:nvSpPr>
+        <p:spPr>
+          <a:xfrm>
+            <a:off x="548640" y="1078992"/>
+            <a:ext cx="11064240" cy="25400"/>
+          </a:xfrm>
+          <a:prstGeom prst="rect">
+            <a:avLst/>
+          </a:prstGeom>
+          <a:solidFill>
+            <a:srgbClr val="30363D"/>
+          </a:solidFill>
+          <a:ln>
+            <a:noFill/>
+          </a:ln>
+          <a:effectLst/>
+        </p:spPr>
+        <p:style>
+          <a:lnRef idx="1">
+            <a:schemeClr val="accent1"/>
+          </a:lnRef>
+          <a:fillRef idx="3">
+            <a:schemeClr val="accent1"/>
+          </a:fillRef>
+          <a:effectRef idx="2">
+            <a:schemeClr val="accent1"/>
+          </a:effectRef>
+          <a:fontRef idx="minor">
+            <a:schemeClr val="lt1"/>
+          </a:fontRef>
+        </p:style>
+        <p:txBody>
+          <a:bodyPr rtlCol="0" anchor="ctr"/>
+          <a:lstStyle/>
+          <a:p>
+            <a:pPr algn="ctr"/>
+          </a:p>
+        </p:txBody>
+      </p:sp>
+      <p:sp>
+        <p:nvSpPr>
+          <p:cNvPr id="5" name="TextBox 4"/>
+          <p:cNvSpPr txBox="1"/>
+          <p:nvPr/>
+        </p:nvSpPr>
+        <p:spPr>
+          <a:xfrm>
+            <a:off x="594360" y="1325880"/>
+            <a:ext cx="11155680" cy="5257800"/>
+          </a:xfrm>
+          <a:prstGeom prst="rect">
+            <a:avLst/>
+          </a:prstGeom>
+          <a:noFill/>
+        </p:spPr>
+        <p:txBody>
+          <a:bodyPr wrap="square">
+            <a:spAutoFit/>
+          </a:bodyPr>
+          <a:lstStyle/>
+          <a:p>
+            <a:pPr>
+              <a:spcAft>
+                <a:spcPts val="400"/>
+              </a:spcAft>
+            </a:pPr>
+            <a:r>
+              <a:rPr sz="1450">
+                <a:solidFill>
+                  <a:srgbClr val="E6EDF3"/>
+                </a:solidFill>
+              </a:rPr>
+              <a:t>The fine-tune turns a lenient noise specialist with a weak 5-value MOS into a calibrated rater:</a:t>
+            </a:r>
+          </a:p>
+          <a:p>
+            <a:pPr>
+              <a:spcAft>
+                <a:spcPts val="400"/>
+              </a:spcAft>
+            </a:pPr>
+            <a:r>
+              <a:rPr sz="1450">
+                <a:solidFill>
+                  <a:srgbClr val="E6EDF3"/>
+                </a:solidFill>
+              </a:rPr>
+              <a:t>•  MOS de-compressed (5→63), rank-aligned with PESQ/NISQA/DNSMOS (ρ 0.65–0.71)</a:t>
+            </a:r>
+          </a:p>
+          <a:p>
+            <a:pPr>
+              <a:spcAft>
+                <a:spcPts val="400"/>
+              </a:spcAft>
+            </a:pPr>
+            <a:r>
+              <a:rPr sz="1450">
+                <a:solidFill>
+                  <a:srgbClr val="E6EDF3"/>
+                </a:solidFill>
+              </a:rPr>
+              <a:t>•  Perceives and ranks every degradation type — incl. the former reverb blind spot</a:t>
+            </a:r>
+          </a:p>
+          <a:p>
+            <a:pPr>
+              <a:spcAft>
+                <a:spcPts val="400"/>
+              </a:spcAft>
+            </a:pPr>
+            <a:r>
+              <a:rPr sz="1450">
+                <a:solidFill>
+                  <a:srgbClr val="E6EDF3"/>
+                </a:solidFill>
+              </a:rPr>
+              <a:t>•  Tracks enhancement gain (+1.05 MOS, 91% of files) → a usable automatic enhancer evaluator</a:t>
             </a:r>
           </a:p>
           <a:p>
@@ -7682,7 +8004,7 @@
                   <a:srgbClr val="9AA7B4"/>
                 </a:solidFill>
               </a:rPr>
-              <a:t>Discriminating WHICH degradation is the residual that v3's synthetic-type data fixes.</a:t>
+              <a:t>Discriminating WHICH degradation is the residual that the synthetic-type data fixes.</a:t>
             </a:r>
           </a:p>
         </p:txBody>
@@ -8084,7 +8406,7 @@
                             <a:srgbClr val="E6EDF3"/>
                           </a:solidFill>
                         </a:rPr>
-                        <a:t>real measured RIRs + synth exp-decay</a:t>
+                        <a:t>real SLR28 RIRs (Apache-2.0) + synthetic</a:t>
                       </a:r>
                     </a:p>
                   </a:txBody>
@@ -8105,7 +8427,7 @@
                             <a:srgbClr val="E6EDF3"/>
                           </a:solidFill>
                         </a:rPr>
-                        <a:t>2,783</a:t>
+                        <a:t>2,138</a:t>
                       </a:r>
                     </a:p>
                   </a:txBody>
@@ -8538,7 +8860,7 @@
                   <a:srgbClr val="9AA7B4"/>
                 </a:solidFill>
               </a:rPr>
-              <a:t>real + synthetic mix is the v3 addition — closes the train/eval gap (eval sweep uses synthetic types).</a:t>
+              <a:t>Every dataset is openly licensed (CC BY 4.0 / Apache-2.0), so the whole corpus regenerates from public data.</a:t>
             </a:r>
           </a:p>
         </p:txBody>

--- a/experiments/results/planb_deck.pptx
+++ b/experiments/results/planb_deck.pptx
@@ -4887,7 +4887,7 @@
                   <a:srgbClr val="3FB950"/>
                 </a:solidFill>
               </a:rPr>
-              <a:t>+0.63</a:t>
+              <a:t>+0.83</a:t>
             </a:r>
           </a:p>
           <a:p>
@@ -4898,7 +4898,7 @@
                   <a:srgbClr val="9AA7B4"/>
                 </a:solidFill>
               </a:rPr>
-              <a:t>real-reverb ρ vs PESQ</a:t>
+              <a:t>measured-reverb ρ vs PESQ</a:t>
             </a:r>
           </a:p>
         </p:txBody>
@@ -5834,7 +5834,7 @@
                   <a:srgbClr val="58A6FF"/>
                 </a:solidFill>
               </a:rPr>
-              <a:t>The reverb result: why the benchmark lied</a:t>
+              <a:t>The reverb result: the benchmark was measuring an artefact</a:t>
             </a:r>
           </a:p>
         </p:txBody>
@@ -5916,7 +5916,7 @@
                   <a:srgbClr val="BC8CFF"/>
                 </a:solidFill>
               </a:rPr>
-              <a:t>Two models, two reverb distributions</a:t>
+              <a:t>Scored against PESQ — which knows nothing about either severity map</a:t>
             </a:r>
           </a:p>
           <a:p>
@@ -5931,7 +5931,7 @@
                   <a:srgbClr val="E6EDF3"/>
                 </a:solidFill>
               </a:rPr>
-              <a:t>•  Scored against PESQ — an independent metric that knows nothing about either</a:t>
+              <a:t>•  synth_reverb injects an explicit direct path → our synthetic reverb has an</a:t>
             </a:r>
           </a:p>
           <a:p>
@@ -5946,22 +5946,7 @@
                   <a:srgbClr val="9AA7B4"/>
                 </a:solidFill>
               </a:rPr>
-              <a:t>    – model's severity map — v3 and the open model disagree, but only about WHICH reverb.</a:t>
-            </a:r>
-          </a:p>
-          <a:p>
-            <a:pPr>
-              <a:spcAft>
-                <a:spcPts val="400"/>
-              </a:spcAft>
-            </a:pPr>
-            <a:r>
-              <a:rPr sz="1450">
-                <a:solidFill>
-                  <a:srgbClr val="E6EDF3"/>
-                </a:solidFill>
-              </a:rPr>
-              <a:t>•  synth_reverb injects an explicit direct path → synthetic reverb has an artificially</a:t>
+              <a:t>    – artificially HIGH DRR at every RT60. v3 keys on RT60 alone — exactly how that</a:t>
             </a:r>
           </a:p>
           <a:p>
@@ -5976,7 +5961,7 @@
                   <a:srgbClr val="9AA7B4"/>
                 </a:solidFill>
               </a:rPr>
-              <a:t>    – HIGH DRR at every RT60. v3 keys on RT60 alone, which is exactly how that sweep grades.</a:t>
+              <a:t>    – sweep grades severity. So the sweep flattered v3 and penalized open.</a:t>
             </a:r>
           </a:p>
           <a:p>
@@ -5991,7 +5976,22 @@
                   <a:srgbClr val="3FB950"/>
                 </a:solidFill>
               </a:rPr>
-              <a:t>On REAL rooms the open model tracks perceived quality ~2x better (+0.63 vs +0.33).</a:t>
+              <a:t>On REAL measured rooms both models do well; open leads modestly (0.83 vs 0.79).</a:t>
+            </a:r>
+          </a:p>
+          <a:p>
+            <a:pPr>
+              <a:spcAft>
+                <a:spcPts val="400"/>
+              </a:spcAft>
+            </a:pPr>
+            <a:r>
+              <a:rPr sz="1500" b="1">
+                <a:solidFill>
+                  <a:srgbClr val="D29922"/>
+                </a:solidFill>
+              </a:rPr>
+              <a:t>The big gap is on SLR28 SIMULATED RIRs — which open trained on. That is an</a:t>
             </a:r>
           </a:p>
           <a:p>
@@ -6006,7 +6006,7 @@
                   <a:srgbClr val="9AA7B4"/>
                 </a:solidFill>
               </a:rPr>
-              <a:t>Lesson: the held-out sweep was measuring the artefact, not the ability. The fix was a</a:t>
+              <a:t>    – in-distribution advantage, not generalization. Reporting it as 'real rooms'</a:t>
             </a:r>
           </a:p>
           <a:p>
@@ -6021,7 +6021,37 @@
                   <a:srgbClr val="9AA7B4"/>
                 </a:solidFill>
               </a:rPr>
-              <a:t>held-out REAL-RIR control (eval_realreverb.py) — now part of the repo.</a:t>
+              <a:t>    – would have been an overclaim (an earlier draft of this control made exactly that</a:t>
+            </a:r>
+          </a:p>
+          <a:p>
+            <a:pPr>
+              <a:spcAft>
+                <a:spcPts val="400"/>
+              </a:spcAft>
+            </a:pPr>
+            <a:r>
+              <a:rPr sz="1300">
+                <a:solidFill>
+                  <a:srgbClr val="9AA7B4"/>
+                </a:solidFill>
+              </a:rPr>
+              <a:t>    – mistake: the pool is 60k simulated vs 320 measured, so uniform sampling drew none).</a:t>
+            </a:r>
+          </a:p>
+          <a:p>
+            <a:pPr>
+              <a:spcAft>
+                <a:spcPts val="400"/>
+              </a:spcAft>
+            </a:pPr>
+            <a:r>
+              <a:rPr sz="1300">
+                <a:solidFill>
+                  <a:srgbClr val="9AA7B4"/>
+                </a:solidFill>
+              </a:rPr>
+              <a:t>Lesson: name your test distribution precisely — eval_realreverb.py now asserts it.</a:t>
             </a:r>
           </a:p>
         </p:txBody>
@@ -6043,7 +6073,7 @@
         <p:spPr>
           <a:xfrm>
             <a:off x="6400800" y="1417320"/>
-            <a:ext cx="5486400" cy="3200400"/>
+            <a:ext cx="5486400" cy="2628900"/>
           </a:xfrm>
           <a:prstGeom prst="rect">
             <a:avLst/>
@@ -8406,7 +8436,7 @@
                             <a:srgbClr val="E6EDF3"/>
                           </a:solidFill>
                         </a:rPr>
-                        <a:t>real SLR28 RIRs (Apache-2.0) + synthetic</a:t>
+                        <a:t>SLR28 simulated RIRs (Apache-2.0) + synthetic</a:t>
                       </a:r>
                     </a:p>
                   </a:txBody>
